--- a/assets/memos/A5-memo.pptx
+++ b/assets/memos/A5-memo.pptx
@@ -3105,8 +3105,8 @@
         </p:nvSpPr>
         <p:spPr>
           <a:xfrm>
-            <a:off x="648000" y="1180800"/>
-            <a:ext cx="5058000" cy="511200"/>
+            <a:off x="532800" y="1180800"/>
+            <a:ext cx="6490800" cy="511200"/>
           </a:xfrm>
           <a:prstGeom prst="rect">
             <a:avLst/>
@@ -3128,7 +3128,7 @@
               </a:spcAft>
             </a:pPr>
             <a:r>
-              <a:rPr sz="2000" b="1" i="0">
+              <a:rPr sz="1800" b="1" i="0">
                 <a:solidFill>
                   <a:srgbClr val="4388BC"/>
                 </a:solidFill>
@@ -4562,8 +4562,8 @@
         </p:nvSpPr>
         <p:spPr>
           <a:xfrm>
-            <a:off x="648000" y="1180800"/>
-            <a:ext cx="5058000" cy="511200"/>
+            <a:off x="532800" y="1180800"/>
+            <a:ext cx="6490800" cy="511200"/>
           </a:xfrm>
           <a:prstGeom prst="rect">
             <a:avLst/>
@@ -4585,7 +4585,7 @@
               </a:spcAft>
             </a:pPr>
             <a:r>
-              <a:rPr sz="2000" b="1" i="0">
+              <a:rPr sz="1800" b="1" i="0">
                 <a:solidFill>
                   <a:srgbClr val="4388BC"/>
                 </a:solidFill>

--- a/assets/memos/A5-memo.pptx
+++ b/assets/memos/A5-memo.pptx
@@ -3402,7 +3402,7 @@
                 </a:solidFill>
                 <a:latin typeface="Arial"/>
               </a:rPr>
-              <a:t>→ Internet, c'est un immense réseau mondial d'ordinateurs, de télép…</a:t>
+              <a:t>→ Internet, c'est un immense réseau mondial d'ordinateurs, de téléphones et d'appareils connectés entre eux, qui échangent des informations en permanence. On peut l'imaginer comme une gigantesque toile d'araignée planétaire.</a:t>
             </a:r>
           </a:p>
           <a:p>
@@ -3440,7 +3440,7 @@
                 </a:solidFill>
                 <a:latin typeface="Arial"/>
               </a:rPr>
-              <a:t>→ Via un fournisseur d'accès (Orange, SFR, Bouygues, Free) qui vous…</a:t>
+              <a:t>→ Via un fournisseur d'accès (Orange, SFR, Bouygues, Free) qui vous relie au réseau grâce à une box internet ou à la 4G/5G de votre téléphone.</a:t>
             </a:r>
           </a:p>
           <a:p>
@@ -4014,7 +4014,7 @@
                 </a:solidFill>
                 <a:latin typeface="Arial"/>
               </a:rPr>
-              <a:t>→ Un navigateur web, c'est le programme que vous utilisez pour affi…</a:t>
+              <a:t>→ Un navigateur web, c'est le programme que vous utilisez pour afficher des pages Internet. C'est lui qui "traduit" les données du réseau en images, textes et vidéos lisibles à l'écran.</a:t>
             </a:r>
           </a:p>
           <a:p>
@@ -4052,7 +4052,7 @@
                 </a:solidFill>
                 <a:latin typeface="Arial"/>
               </a:rPr>
-              <a:t>→ Le plus populaire. Rapide, compatible avec la majorité des sites.…</a:t>
+              <a:t>→ Le plus populaire. Rapide, compatible avec la majorité des sites. Développé par Google.</a:t>
             </a:r>
           </a:p>
           <a:p>
@@ -4320,7 +4320,7 @@
                 </a:solidFill>
                 <a:latin typeface="Arial"/>
               </a:rPr>
-              <a:t>→ Quand vous ouvrez votre navigateur, voici les éléments essentiels…</a:t>
+              <a:t>→ Quand vous ouvrez votre navigateur, voici les éléments essentiels à connaître pour vous repérer :</a:t>
             </a:r>
           </a:p>
           <a:p>
@@ -4358,7 +4358,7 @@
                 </a:solidFill>
                 <a:latin typeface="Arial"/>
               </a:rPr>
-              <a:t>→ C'est le champ en haut de votre navigateur. Vous y tapez l'adress…</a:t>
+              <a:t>→ C'est le champ en haut de votre navigateur. Vous y tapez l'adresse d'un site (ex. : www.service-public.fr) ou directement votre recherche. C'est votre point de départ.</a:t>
             </a:r>
           </a:p>
           <a:p>
@@ -4462,7 +4462,7 @@
                 </a:solidFill>
                 <a:latin typeface="Arial"/>
               </a:rPr>
-              <a:t>→ Suite en page 2 : Les moteurs de recherche : comment ça marche … | Bien formuler sa recherche | Comprendre une adresse web (URL)</a:t>
+              <a:t>→ Suite en page 2 : Les moteurs de recherche : comment ça marche ? | Bien formuler sa recherche | Comprendre une adresse web (URL)</a:t>
             </a:r>
           </a:p>
           <a:p>
@@ -4817,7 +4817,7 @@
                 </a:solidFill>
                 <a:latin typeface="Arial"/>
               </a:rPr>
-              <a:t>Les moteurs de recherche : comment ça marche …</a:t>
+              <a:t>Les moteurs de recherche : comment ça marche ?</a:t>
             </a:r>
           </a:p>
         </p:txBody>
@@ -4859,7 +4859,7 @@
                 </a:solidFill>
                 <a:latin typeface="Arial"/>
               </a:rPr>
-              <a:t>→ Un moteur de recherche est un service en ligne qui explore et ind…</a:t>
+              <a:t>→ Un moteur de recherche est un service en ligne qui explore et indexe des milliards de pages web pour vous retourner les résultats les plus pertinents selon vos mots-clés.</a:t>
             </a:r>
           </a:p>
           <a:p>
@@ -4878,7 +4878,7 @@
                 </a:solidFill>
                 <a:latin typeface="Arial"/>
               </a:rPr>
-              <a:t>→ Google est le moteur utilisé par défaut par la plupart des gens. …</a:t>
+              <a:t>→ Google est le moteur utilisé par défaut par la plupart des gens. Mais Qwant ou DuckDuckGo sont d'excellentes alternatives si vous souhaitez préserver votre vie privée.</a:t>
             </a:r>
           </a:p>
         </p:txBody>
@@ -5127,7 +5127,7 @@
                 </a:solidFill>
                 <a:latin typeface="Arial"/>
               </a:rPr>
-              <a:t>→ La qualité de vos résultats dépend directement des mots que vous …</a:t>
+              <a:t>→ La qualité de vos résultats dépend directement des mots que vous tapez. Quelques astuces simples pour mieux chercher :</a:t>
             </a:r>
           </a:p>
           <a:p>
@@ -5165,7 +5165,7 @@
                 </a:solidFill>
                 <a:latin typeface="Arial"/>
               </a:rPr>
-              <a:t>→ Tapez les mots-clés essentiels, pas une phrase entière. Ex. : hor…</a:t>
+              <a:t>→ Tapez les mots-clés essentiels, pas une phrase entière. Ex. : horaires mairie Lyon plutôt que "Je voudrais savoir à quelle heure ouvre la mairie de Lyon".</a:t>
             </a:r>
           </a:p>
           <a:p>
@@ -5433,7 +5433,7 @@
                 </a:solidFill>
                 <a:latin typeface="Arial"/>
               </a:rPr>
-              <a:t>→ Une adresse web, ou URL (Uniform Resource Locator), c'est comme l…</a:t>
+              <a:t>→ Une adresse web, ou URL (Uniform Resource Locator), c'est comme l'adresse postale d'une page sur Internet. Elle est unique et permet à votre navigateur de trouver exactement ce que vous cherchez.</a:t>
             </a:r>
           </a:p>
           <a:p>
@@ -5471,7 +5471,7 @@
                 </a:solidFill>
                 <a:latin typeface="Arial"/>
               </a:rPr>
-              <a:t>→ C'est la méthode de communication entre votre navigateur et le si…</a:t>
+              <a:t>→ C'est la méthode de communication entre votre navigateur et le site web. Le s de https signifie "sécurisé". C'est important !</a:t>
             </a:r>
           </a:p>
           <a:p>

--- a/assets/memos/A5-memo.pptx
+++ b/assets/memos/A5-memo.pptx
@@ -3167,7 +3167,7 @@
         <p:spPr>
           <a:xfrm>
             <a:off x="532800" y="1749600"/>
-            <a:ext cx="6490800" cy="1371600"/>
+            <a:ext cx="6490800" cy="1684800"/>
           </a:xfrm>
           <a:prstGeom prst="rect">
             <a:avLst/>
@@ -3208,7 +3208,7 @@
         <p:spPr>
           <a:xfrm>
             <a:off x="532800" y="1749600"/>
-            <a:ext cx="572400" cy="1371600"/>
+            <a:ext cx="572400" cy="1684800"/>
           </a:xfrm>
           <a:prstGeom prst="rect">
             <a:avLst/>
@@ -3374,7 +3374,7 @@
         <p:spPr>
           <a:xfrm>
             <a:off x="1159200" y="2214000"/>
-            <a:ext cx="5828400" cy="885600"/>
+            <a:ext cx="5828400" cy="1184399"/>
           </a:xfrm>
           <a:prstGeom prst="rect">
             <a:avLst/>
@@ -3472,7 +3472,7 @@
         </p:nvSpPr>
         <p:spPr>
           <a:xfrm>
-            <a:off x="532800" y="3186000"/>
+            <a:off x="532800" y="3499199"/>
             <a:ext cx="6490800" cy="1371600"/>
           </a:xfrm>
           <a:prstGeom prst="rect">
@@ -3513,7 +3513,7 @@
         </p:nvSpPr>
         <p:spPr>
           <a:xfrm>
-            <a:off x="532800" y="3186000"/>
+            <a:off x="532800" y="3499199"/>
             <a:ext cx="572400" cy="1371600"/>
           </a:xfrm>
           <a:prstGeom prst="rect">
@@ -3554,7 +3554,7 @@
         </p:nvSpPr>
         <p:spPr>
           <a:xfrm>
-            <a:off x="1206000" y="3607200"/>
+            <a:off x="1206000" y="3920399"/>
             <a:ext cx="5752800" cy="7200"/>
           </a:xfrm>
           <a:prstGeom prst="rect">
@@ -3595,7 +3595,7 @@
         </p:nvSpPr>
         <p:spPr>
           <a:xfrm>
-            <a:off x="532800" y="3252600"/>
+            <a:off x="532800" y="3565800"/>
             <a:ext cx="572400" cy="288000"/>
           </a:xfrm>
           <a:prstGeom prst="rect">
@@ -3637,7 +3637,7 @@
         </p:nvSpPr>
         <p:spPr>
           <a:xfrm>
-            <a:off x="1177200" y="3221999"/>
+            <a:off x="1177200" y="3535199"/>
             <a:ext cx="5810400" cy="370799"/>
           </a:xfrm>
           <a:prstGeom prst="rect">
@@ -3679,8 +3679,8 @@
         </p:nvSpPr>
         <p:spPr>
           <a:xfrm>
-            <a:off x="1159200" y="3650399"/>
-            <a:ext cx="5828400" cy="885600"/>
+            <a:off x="1159200" y="3963599"/>
+            <a:ext cx="5828400" cy="871200"/>
           </a:xfrm>
           <a:prstGeom prst="rect">
             <a:avLst/>
@@ -3778,8 +3778,8 @@
         </p:nvSpPr>
         <p:spPr>
           <a:xfrm>
-            <a:off x="532800" y="4622400"/>
-            <a:ext cx="6490800" cy="1371600"/>
+            <a:off x="532800" y="4935600"/>
+            <a:ext cx="6490800" cy="1684800"/>
           </a:xfrm>
           <a:prstGeom prst="rect">
             <a:avLst/>
@@ -3819,8 +3819,8 @@
         </p:nvSpPr>
         <p:spPr>
           <a:xfrm>
-            <a:off x="532800" y="4622400"/>
-            <a:ext cx="572400" cy="1371600"/>
+            <a:off x="532800" y="4935600"/>
+            <a:ext cx="572400" cy="1684800"/>
           </a:xfrm>
           <a:prstGeom prst="rect">
             <a:avLst/>
@@ -3860,7 +3860,7 @@
         </p:nvSpPr>
         <p:spPr>
           <a:xfrm>
-            <a:off x="1206000" y="5043600"/>
+            <a:off x="1206000" y="5356800"/>
             <a:ext cx="5752800" cy="7200"/>
           </a:xfrm>
           <a:prstGeom prst="rect">
@@ -3901,7 +3901,7 @@
         </p:nvSpPr>
         <p:spPr>
           <a:xfrm>
-            <a:off x="532800" y="4689000"/>
+            <a:off x="532800" y="5002200"/>
             <a:ext cx="572400" cy="288000"/>
           </a:xfrm>
           <a:prstGeom prst="rect">
@@ -3943,7 +3943,7 @@
         </p:nvSpPr>
         <p:spPr>
           <a:xfrm>
-            <a:off x="1177200" y="4658400"/>
+            <a:off x="1177200" y="4971600"/>
             <a:ext cx="5810400" cy="370799"/>
           </a:xfrm>
           <a:prstGeom prst="rect">
@@ -3985,8 +3985,8 @@
         </p:nvSpPr>
         <p:spPr>
           <a:xfrm>
-            <a:off x="1159200" y="5086800"/>
-            <a:ext cx="5828400" cy="885600"/>
+            <a:off x="1159200" y="5399999"/>
+            <a:ext cx="5828400" cy="1184399"/>
           </a:xfrm>
           <a:prstGeom prst="rect">
             <a:avLst/>
@@ -4084,8 +4084,8 @@
         </p:nvSpPr>
         <p:spPr>
           <a:xfrm>
-            <a:off x="532800" y="6058799"/>
-            <a:ext cx="6490800" cy="1371600"/>
+            <a:off x="532800" y="6685200"/>
+            <a:ext cx="6490800" cy="1533600"/>
           </a:xfrm>
           <a:prstGeom prst="rect">
             <a:avLst/>
@@ -4125,8 +4125,8 @@
         </p:nvSpPr>
         <p:spPr>
           <a:xfrm>
-            <a:off x="532800" y="6058799"/>
-            <a:ext cx="572400" cy="1371600"/>
+            <a:off x="532800" y="6685200"/>
+            <a:ext cx="572400" cy="1533600"/>
           </a:xfrm>
           <a:prstGeom prst="rect">
             <a:avLst/>
@@ -4166,7 +4166,7 @@
         </p:nvSpPr>
         <p:spPr>
           <a:xfrm>
-            <a:off x="1206000" y="6480000"/>
+            <a:off x="1206000" y="7106400"/>
             <a:ext cx="5752800" cy="7200"/>
           </a:xfrm>
           <a:prstGeom prst="rect">
@@ -4207,7 +4207,7 @@
         </p:nvSpPr>
         <p:spPr>
           <a:xfrm>
-            <a:off x="532800" y="6125399"/>
+            <a:off x="532800" y="6751800"/>
             <a:ext cx="572400" cy="288000"/>
           </a:xfrm>
           <a:prstGeom prst="rect">
@@ -4249,7 +4249,7 @@
         </p:nvSpPr>
         <p:spPr>
           <a:xfrm>
-            <a:off x="1177200" y="6094800"/>
+            <a:off x="1177200" y="6721200"/>
             <a:ext cx="5810400" cy="370799"/>
           </a:xfrm>
           <a:prstGeom prst="rect">
@@ -4278,7 +4278,7 @@
                 </a:solidFill>
                 <a:latin typeface="Arial"/>
               </a:rPr>
-              <a:t>Anatomie d'une page web</a:t>
+              <a:t>Les moteurs de recherche : comment ça marche ?</a:t>
             </a:r>
           </a:p>
         </p:txBody>
@@ -4291,8 +4291,8 @@
         </p:nvSpPr>
         <p:spPr>
           <a:xfrm>
-            <a:off x="1159200" y="6523200"/>
-            <a:ext cx="5828400" cy="885600"/>
+            <a:off x="1159200" y="7149600"/>
+            <a:ext cx="5828400" cy="1033199"/>
           </a:xfrm>
           <a:prstGeom prst="rect">
             <a:avLst/>
@@ -4320,7 +4320,7 @@
                 </a:solidFill>
                 <a:latin typeface="Arial"/>
               </a:rPr>
-              <a:t>→ Quand vous ouvrez votre navigateur, voici les éléments essentiels à connaître pour vous repérer :</a:t>
+              <a:t>→ Un moteur de recherche est un service en ligne qui explore et indexe des milliards de pages web pour vous retourner les résultats les plus pertinents selon vos mots-clés.</a:t>
             </a:r>
           </a:p>
           <a:p>
@@ -4339,45 +4339,7 @@
                 </a:solidFill>
                 <a:latin typeface="Arial"/>
               </a:rPr>
-              <a:t>→ La barre d'adresse</a:t>
-            </a:r>
-          </a:p>
-          <a:p>
-            <a:pPr algn="l">
-              <a:spcBef>
-                <a:spcPts val="0"/>
-              </a:spcBef>
-              <a:spcAft>
-                <a:spcPts val="100"/>
-              </a:spcAft>
-            </a:pPr>
-            <a:r>
-              <a:rPr sz="1000" b="0" i="0">
-                <a:solidFill>
-                  <a:srgbClr val="2B2B2B"/>
-                </a:solidFill>
-                <a:latin typeface="Arial"/>
-              </a:rPr>
-              <a:t>→ C'est le champ en haut de votre navigateur. Vous y tapez l'adresse d'un site (ex. : www.service-public.fr) ou directement votre recherche. C'est votre point de départ.</a:t>
-            </a:r>
-          </a:p>
-          <a:p>
-            <a:pPr algn="l">
-              <a:spcBef>
-                <a:spcPts val="0"/>
-              </a:spcBef>
-              <a:spcAft>
-                <a:spcPts val="100"/>
-              </a:spcAft>
-            </a:pPr>
-            <a:r>
-              <a:rPr sz="1000" b="0" i="0">
-                <a:solidFill>
-                  <a:srgbClr val="2B2B2B"/>
-                </a:solidFill>
-                <a:latin typeface="Arial"/>
-              </a:rPr>
-              <a:t>→ Les boutons de navigation</a:t>
+              <a:t>→ Google est le moteur utilisé par défaut par la plupart des gens. Mais Qwant ou DuckDuckGo sont d'excellentes alternatives si vous souhaitez préserver votre vie privée.</a:t>
             </a:r>
           </a:p>
         </p:txBody>
@@ -4390,7 +4352,7 @@
         </p:nvSpPr>
         <p:spPr>
           <a:xfrm>
-            <a:off x="532800" y="7639200"/>
+            <a:off x="532800" y="8355599"/>
             <a:ext cx="6490800" cy="658800"/>
           </a:xfrm>
           <a:prstGeom prst="rect">
@@ -4433,7 +4395,7 @@
         </p:nvSpPr>
         <p:spPr>
           <a:xfrm>
-            <a:off x="1540799" y="7675200"/>
+            <a:off x="1540799" y="8391600"/>
             <a:ext cx="5410800" cy="604800"/>
           </a:xfrm>
           <a:prstGeom prst="rect">
@@ -4462,7 +4424,7 @@
                 </a:solidFill>
                 <a:latin typeface="Arial"/>
               </a:rPr>
-              <a:t>→ Suite en page 2 : Les moteurs de recherche : comment ça marche ? | Bien formuler sa recherche | Comprendre une adresse web (URL)</a:t>
+              <a:t>→ Suite en page 2 : Anatomie d'une page web | Bien formuler sa recherche | Comprendre une adresse web (URL)</a:t>
             </a:r>
           </a:p>
           <a:p>
@@ -4624,7 +4586,7 @@
         <p:spPr>
           <a:xfrm>
             <a:off x="532800" y="1749600"/>
-            <a:ext cx="6490800" cy="1371600"/>
+            <a:ext cx="6490800" cy="1684800"/>
           </a:xfrm>
           <a:prstGeom prst="rect">
             <a:avLst/>
@@ -4665,7 +4627,7 @@
         <p:spPr>
           <a:xfrm>
             <a:off x="532800" y="1749600"/>
-            <a:ext cx="572400" cy="1371600"/>
+            <a:ext cx="572400" cy="1684800"/>
           </a:xfrm>
           <a:prstGeom prst="rect">
             <a:avLst/>
@@ -4817,7 +4779,7 @@
                 </a:solidFill>
                 <a:latin typeface="Arial"/>
               </a:rPr>
-              <a:t>Les moteurs de recherche : comment ça marche ?</a:t>
+              <a:t>Anatomie d'une page web</a:t>
             </a:r>
           </a:p>
         </p:txBody>
@@ -4831,7 +4793,7 @@
         <p:spPr>
           <a:xfrm>
             <a:off x="1159200" y="2214000"/>
-            <a:ext cx="5828400" cy="885600"/>
+            <a:ext cx="5828400" cy="1184399"/>
           </a:xfrm>
           <a:prstGeom prst="rect">
             <a:avLst/>
@@ -4859,7 +4821,7 @@
                 </a:solidFill>
                 <a:latin typeface="Arial"/>
               </a:rPr>
-              <a:t>→ Un moteur de recherche est un service en ligne qui explore et indexe des milliards de pages web pour vous retourner les résultats les plus pertinents selon vos mots-clés.</a:t>
+              <a:t>→ Quand vous ouvrez votre navigateur, voici les éléments essentiels à connaître pour vous repérer :</a:t>
             </a:r>
           </a:p>
           <a:p>
@@ -4878,7 +4840,45 @@
                 </a:solidFill>
                 <a:latin typeface="Arial"/>
               </a:rPr>
-              <a:t>→ Google est le moteur utilisé par défaut par la plupart des gens. Mais Qwant ou DuckDuckGo sont d'excellentes alternatives si vous souhaitez préserver votre vie privée.</a:t>
+              <a:t>→ La barre d'adresse</a:t>
+            </a:r>
+          </a:p>
+          <a:p>
+            <a:pPr algn="l">
+              <a:spcBef>
+                <a:spcPts val="0"/>
+              </a:spcBef>
+              <a:spcAft>
+                <a:spcPts val="100"/>
+              </a:spcAft>
+            </a:pPr>
+            <a:r>
+              <a:rPr sz="1000" b="0" i="0">
+                <a:solidFill>
+                  <a:srgbClr val="2B2B2B"/>
+                </a:solidFill>
+                <a:latin typeface="Arial"/>
+              </a:rPr>
+              <a:t>→ C'est le champ en haut de votre navigateur. Vous y tapez l'adresse d'un site (ex. : www.service-public.fr) ou directement votre recherche. C'est votre point de départ.</a:t>
+            </a:r>
+          </a:p>
+          <a:p>
+            <a:pPr algn="l">
+              <a:spcBef>
+                <a:spcPts val="0"/>
+              </a:spcBef>
+              <a:spcAft>
+                <a:spcPts val="100"/>
+              </a:spcAft>
+            </a:pPr>
+            <a:r>
+              <a:rPr sz="1000" b="0" i="0">
+                <a:solidFill>
+                  <a:srgbClr val="2B2B2B"/>
+                </a:solidFill>
+                <a:latin typeface="Arial"/>
+              </a:rPr>
+              <a:t>→ Les boutons de navigation</a:t>
             </a:r>
           </a:p>
         </p:txBody>
@@ -4891,8 +4891,8 @@
         </p:nvSpPr>
         <p:spPr>
           <a:xfrm>
-            <a:off x="532800" y="3186000"/>
-            <a:ext cx="6490800" cy="1371600"/>
+            <a:off x="532800" y="3499199"/>
+            <a:ext cx="6490800" cy="1533600"/>
           </a:xfrm>
           <a:prstGeom prst="rect">
             <a:avLst/>
@@ -4932,8 +4932,8 @@
         </p:nvSpPr>
         <p:spPr>
           <a:xfrm>
-            <a:off x="532800" y="3186000"/>
-            <a:ext cx="572400" cy="1371600"/>
+            <a:off x="532800" y="3499199"/>
+            <a:ext cx="572400" cy="1533600"/>
           </a:xfrm>
           <a:prstGeom prst="rect">
             <a:avLst/>
@@ -4973,7 +4973,7 @@
         </p:nvSpPr>
         <p:spPr>
           <a:xfrm>
-            <a:off x="1206000" y="3607200"/>
+            <a:off x="1206000" y="3920399"/>
             <a:ext cx="5752800" cy="7200"/>
           </a:xfrm>
           <a:prstGeom prst="rect">
@@ -5014,7 +5014,7 @@
         </p:nvSpPr>
         <p:spPr>
           <a:xfrm>
-            <a:off x="532800" y="3252600"/>
+            <a:off x="532800" y="3565800"/>
             <a:ext cx="572400" cy="288000"/>
           </a:xfrm>
           <a:prstGeom prst="rect">
@@ -5056,7 +5056,7 @@
         </p:nvSpPr>
         <p:spPr>
           <a:xfrm>
-            <a:off x="1177200" y="3221999"/>
+            <a:off x="1177200" y="3535199"/>
             <a:ext cx="5810400" cy="370799"/>
           </a:xfrm>
           <a:prstGeom prst="rect">
@@ -5098,8 +5098,8 @@
         </p:nvSpPr>
         <p:spPr>
           <a:xfrm>
-            <a:off x="1159200" y="3650399"/>
-            <a:ext cx="5828400" cy="885600"/>
+            <a:off x="1159200" y="3963599"/>
+            <a:ext cx="5828400" cy="1033199"/>
           </a:xfrm>
           <a:prstGeom prst="rect">
             <a:avLst/>
@@ -5197,8 +5197,8 @@
         </p:nvSpPr>
         <p:spPr>
           <a:xfrm>
-            <a:off x="532800" y="4622400"/>
-            <a:ext cx="6490800" cy="1371600"/>
+            <a:off x="532800" y="5097599"/>
+            <a:ext cx="6490800" cy="1684800"/>
           </a:xfrm>
           <a:prstGeom prst="rect">
             <a:avLst/>
@@ -5238,8 +5238,8 @@
         </p:nvSpPr>
         <p:spPr>
           <a:xfrm>
-            <a:off x="532800" y="4622400"/>
-            <a:ext cx="572400" cy="1371600"/>
+            <a:off x="532800" y="5097599"/>
+            <a:ext cx="572400" cy="1684800"/>
           </a:xfrm>
           <a:prstGeom prst="rect">
             <a:avLst/>
@@ -5279,7 +5279,7 @@
         </p:nvSpPr>
         <p:spPr>
           <a:xfrm>
-            <a:off x="1206000" y="5043600"/>
+            <a:off x="1206000" y="5518799"/>
             <a:ext cx="5752800" cy="7200"/>
           </a:xfrm>
           <a:prstGeom prst="rect">
@@ -5320,7 +5320,7 @@
         </p:nvSpPr>
         <p:spPr>
           <a:xfrm>
-            <a:off x="532800" y="4689000"/>
+            <a:off x="532800" y="5164200"/>
             <a:ext cx="572400" cy="288000"/>
           </a:xfrm>
           <a:prstGeom prst="rect">
@@ -5362,7 +5362,7 @@
         </p:nvSpPr>
         <p:spPr>
           <a:xfrm>
-            <a:off x="1177200" y="4658400"/>
+            <a:off x="1177200" y="5133599"/>
             <a:ext cx="5810400" cy="370799"/>
           </a:xfrm>
           <a:prstGeom prst="rect">
@@ -5404,8 +5404,8 @@
         </p:nvSpPr>
         <p:spPr>
           <a:xfrm>
-            <a:off x="1159200" y="5086800"/>
-            <a:ext cx="5828400" cy="885600"/>
+            <a:off x="1159200" y="5561999"/>
+            <a:ext cx="5828400" cy="1184399"/>
           </a:xfrm>
           <a:prstGeom prst="rect">
             <a:avLst/>

--- a/assets/memos/A5-memo.pptx
+++ b/assets/memos/A5-memo.pptx
@@ -3097,9 +3097,35 @@
         <p:nvPr/>
       </p:nvGrpSpPr>
       <p:grpSpPr/>
-      <p:sp>
-        <p:nvSpPr>
-          <p:cNvPr id="2" name="TextBox 1"/>
+      <p:pic>
+        <p:nvPicPr>
+          <p:cNvPr id="2" name="Picture 1" descr="bg-p1.png"/>
+          <p:cNvPicPr>
+            <a:picLocks noChangeAspect="1"/>
+          </p:cNvPicPr>
+          <p:nvPr/>
+        </p:nvPicPr>
+        <p:blipFill>
+          <a:blip r:embed="rId2">
+            <a:alphaModFix amt="80000"/>
+          </a:blip>
+          <a:stretch>
+            <a:fillRect/>
+          </a:stretch>
+        </p:blipFill>
+        <p:spPr>
+          <a:xfrm>
+            <a:off x="0" y="0"/>
+            <a:ext cx="7556399" cy="10692000"/>
+          </a:xfrm>
+          <a:prstGeom prst="rect">
+            <a:avLst/>
+          </a:prstGeom>
+        </p:spPr>
+      </p:pic>
+      <p:sp>
+        <p:nvSpPr>
+          <p:cNvPr id="3" name="TextBox 2"/>
           <p:cNvSpPr txBox="1"/>
           <p:nvPr/>
         </p:nvSpPr>
@@ -3160,7 +3186,7 @@
       </p:sp>
       <p:sp>
         <p:nvSpPr>
-          <p:cNvPr id="3" name="Rectangle 2"/>
+          <p:cNvPr id="4" name="Rectangle 3"/>
           <p:cNvSpPr/>
           <p:nvPr/>
         </p:nvSpPr>
@@ -3201,7 +3227,7 @@
       </p:sp>
       <p:sp>
         <p:nvSpPr>
-          <p:cNvPr id="4" name="Rectangle 3"/>
+          <p:cNvPr id="5" name="Rectangle 4"/>
           <p:cNvSpPr/>
           <p:nvPr/>
         </p:nvSpPr>
@@ -3242,7 +3268,7 @@
       </p:sp>
       <p:sp>
         <p:nvSpPr>
-          <p:cNvPr id="5" name="Rectangle 4"/>
+          <p:cNvPr id="6" name="Rectangle 5"/>
           <p:cNvSpPr/>
           <p:nvPr/>
         </p:nvSpPr>
@@ -3283,7 +3309,7 @@
       </p:sp>
       <p:sp>
         <p:nvSpPr>
-          <p:cNvPr id="6" name="TextBox 5"/>
+          <p:cNvPr id="7" name="TextBox 6"/>
           <p:cNvSpPr txBox="1"/>
           <p:nvPr/>
         </p:nvSpPr>
@@ -3325,7 +3351,7 @@
       </p:sp>
       <p:sp>
         <p:nvSpPr>
-          <p:cNvPr id="7" name="TextBox 6"/>
+          <p:cNvPr id="8" name="TextBox 7"/>
           <p:cNvSpPr txBox="1"/>
           <p:nvPr/>
         </p:nvSpPr>
@@ -3367,7 +3393,7 @@
       </p:sp>
       <p:sp>
         <p:nvSpPr>
-          <p:cNvPr id="8" name="TextBox 7"/>
+          <p:cNvPr id="9" name="TextBox 8"/>
           <p:cNvSpPr txBox="1"/>
           <p:nvPr/>
         </p:nvSpPr>
@@ -3466,7 +3492,7 @@
       </p:sp>
       <p:sp>
         <p:nvSpPr>
-          <p:cNvPr id="9" name="Rectangle 8"/>
+          <p:cNvPr id="10" name="Rectangle 9"/>
           <p:cNvSpPr/>
           <p:nvPr/>
         </p:nvSpPr>
@@ -3507,7 +3533,7 @@
       </p:sp>
       <p:sp>
         <p:nvSpPr>
-          <p:cNvPr id="10" name="Rectangle 9"/>
+          <p:cNvPr id="11" name="Rectangle 10"/>
           <p:cNvSpPr/>
           <p:nvPr/>
         </p:nvSpPr>
@@ -3548,7 +3574,7 @@
       </p:sp>
       <p:sp>
         <p:nvSpPr>
-          <p:cNvPr id="11" name="Rectangle 10"/>
+          <p:cNvPr id="12" name="Rectangle 11"/>
           <p:cNvSpPr/>
           <p:nvPr/>
         </p:nvSpPr>
@@ -3589,7 +3615,7 @@
       </p:sp>
       <p:sp>
         <p:nvSpPr>
-          <p:cNvPr id="12" name="TextBox 11"/>
+          <p:cNvPr id="13" name="TextBox 12"/>
           <p:cNvSpPr txBox="1"/>
           <p:nvPr/>
         </p:nvSpPr>
@@ -3631,7 +3657,7 @@
       </p:sp>
       <p:sp>
         <p:nvSpPr>
-          <p:cNvPr id="13" name="TextBox 12"/>
+          <p:cNvPr id="14" name="TextBox 13"/>
           <p:cNvSpPr txBox="1"/>
           <p:nvPr/>
         </p:nvSpPr>
@@ -3673,7 +3699,7 @@
       </p:sp>
       <p:sp>
         <p:nvSpPr>
-          <p:cNvPr id="14" name="TextBox 13"/>
+          <p:cNvPr id="15" name="TextBox 14"/>
           <p:cNvSpPr txBox="1"/>
           <p:nvPr/>
         </p:nvSpPr>
@@ -3772,7 +3798,7 @@
       </p:sp>
       <p:sp>
         <p:nvSpPr>
-          <p:cNvPr id="15" name="Rectangle 14"/>
+          <p:cNvPr id="16" name="Rectangle 15"/>
           <p:cNvSpPr/>
           <p:nvPr/>
         </p:nvSpPr>
@@ -3813,7 +3839,7 @@
       </p:sp>
       <p:sp>
         <p:nvSpPr>
-          <p:cNvPr id="16" name="Rectangle 15"/>
+          <p:cNvPr id="17" name="Rectangle 16"/>
           <p:cNvSpPr/>
           <p:nvPr/>
         </p:nvSpPr>
@@ -3854,7 +3880,7 @@
       </p:sp>
       <p:sp>
         <p:nvSpPr>
-          <p:cNvPr id="17" name="Rectangle 16"/>
+          <p:cNvPr id="18" name="Rectangle 17"/>
           <p:cNvSpPr/>
           <p:nvPr/>
         </p:nvSpPr>
@@ -3895,7 +3921,7 @@
       </p:sp>
       <p:sp>
         <p:nvSpPr>
-          <p:cNvPr id="18" name="TextBox 17"/>
+          <p:cNvPr id="19" name="TextBox 18"/>
           <p:cNvSpPr txBox="1"/>
           <p:nvPr/>
         </p:nvSpPr>
@@ -3937,7 +3963,7 @@
       </p:sp>
       <p:sp>
         <p:nvSpPr>
-          <p:cNvPr id="19" name="TextBox 18"/>
+          <p:cNvPr id="20" name="TextBox 19"/>
           <p:cNvSpPr txBox="1"/>
           <p:nvPr/>
         </p:nvSpPr>
@@ -3979,7 +4005,7 @@
       </p:sp>
       <p:sp>
         <p:nvSpPr>
-          <p:cNvPr id="20" name="TextBox 19"/>
+          <p:cNvPr id="21" name="TextBox 20"/>
           <p:cNvSpPr txBox="1"/>
           <p:nvPr/>
         </p:nvSpPr>
@@ -4078,7 +4104,7 @@
       </p:sp>
       <p:sp>
         <p:nvSpPr>
-          <p:cNvPr id="21" name="Rectangle 20"/>
+          <p:cNvPr id="22" name="Rectangle 21"/>
           <p:cNvSpPr/>
           <p:nvPr/>
         </p:nvSpPr>
@@ -4119,7 +4145,7 @@
       </p:sp>
       <p:sp>
         <p:nvSpPr>
-          <p:cNvPr id="22" name="Rectangle 21"/>
+          <p:cNvPr id="23" name="Rectangle 22"/>
           <p:cNvSpPr/>
           <p:nvPr/>
         </p:nvSpPr>
@@ -4160,7 +4186,7 @@
       </p:sp>
       <p:sp>
         <p:nvSpPr>
-          <p:cNvPr id="23" name="Rectangle 22"/>
+          <p:cNvPr id="24" name="Rectangle 23"/>
           <p:cNvSpPr/>
           <p:nvPr/>
         </p:nvSpPr>
@@ -4201,7 +4227,7 @@
       </p:sp>
       <p:sp>
         <p:nvSpPr>
-          <p:cNvPr id="24" name="TextBox 23"/>
+          <p:cNvPr id="25" name="TextBox 24"/>
           <p:cNvSpPr txBox="1"/>
           <p:nvPr/>
         </p:nvSpPr>
@@ -4243,7 +4269,7 @@
       </p:sp>
       <p:sp>
         <p:nvSpPr>
-          <p:cNvPr id="25" name="TextBox 24"/>
+          <p:cNvPr id="26" name="TextBox 25"/>
           <p:cNvSpPr txBox="1"/>
           <p:nvPr/>
         </p:nvSpPr>
@@ -4285,7 +4311,7 @@
       </p:sp>
       <p:sp>
         <p:nvSpPr>
-          <p:cNvPr id="26" name="TextBox 25"/>
+          <p:cNvPr id="27" name="TextBox 26"/>
           <p:cNvSpPr txBox="1"/>
           <p:nvPr/>
         </p:nvSpPr>
@@ -4346,7 +4372,7 @@
       </p:sp>
       <p:sp>
         <p:nvSpPr>
-          <p:cNvPr id="27" name="Rectangle 26"/>
+          <p:cNvPr id="28" name="Rectangle 27"/>
           <p:cNvSpPr/>
           <p:nvPr/>
         </p:nvSpPr>
@@ -4389,7 +4415,7 @@
       </p:sp>
       <p:sp>
         <p:nvSpPr>
-          <p:cNvPr id="28" name="TextBox 27"/>
+          <p:cNvPr id="29" name="TextBox 28"/>
           <p:cNvSpPr txBox="1"/>
           <p:nvPr/>
         </p:nvSpPr>
@@ -4450,7 +4476,7 @@
       </p:sp>
       <p:sp>
         <p:nvSpPr>
-          <p:cNvPr id="29" name="TextBox 28"/>
+          <p:cNvPr id="30" name="TextBox 29"/>
           <p:cNvSpPr txBox="1"/>
           <p:nvPr/>
         </p:nvSpPr>
@@ -4516,9 +4542,35 @@
         <p:nvPr/>
       </p:nvGrpSpPr>
       <p:grpSpPr/>
-      <p:sp>
-        <p:nvSpPr>
-          <p:cNvPr id="2" name="TextBox 1"/>
+      <p:pic>
+        <p:nvPicPr>
+          <p:cNvPr id="2" name="Picture 1" descr="bg-p2.png"/>
+          <p:cNvPicPr>
+            <a:picLocks noChangeAspect="1"/>
+          </p:cNvPicPr>
+          <p:nvPr/>
+        </p:nvPicPr>
+        <p:blipFill>
+          <a:blip r:embed="rId2">
+            <a:alphaModFix amt="80000"/>
+          </a:blip>
+          <a:stretch>
+            <a:fillRect/>
+          </a:stretch>
+        </p:blipFill>
+        <p:spPr>
+          <a:xfrm>
+            <a:off x="0" y="0"/>
+            <a:ext cx="7556399" cy="10692000"/>
+          </a:xfrm>
+          <a:prstGeom prst="rect">
+            <a:avLst/>
+          </a:prstGeom>
+        </p:spPr>
+      </p:pic>
+      <p:sp>
+        <p:nvSpPr>
+          <p:cNvPr id="3" name="TextBox 2"/>
           <p:cNvSpPr txBox="1"/>
           <p:nvPr/>
         </p:nvSpPr>
@@ -4579,7 +4631,7 @@
       </p:sp>
       <p:sp>
         <p:nvSpPr>
-          <p:cNvPr id="3" name="Rectangle 2"/>
+          <p:cNvPr id="4" name="Rectangle 3"/>
           <p:cNvSpPr/>
           <p:nvPr/>
         </p:nvSpPr>
@@ -4620,7 +4672,7 @@
       </p:sp>
       <p:sp>
         <p:nvSpPr>
-          <p:cNvPr id="4" name="Rectangle 3"/>
+          <p:cNvPr id="5" name="Rectangle 4"/>
           <p:cNvSpPr/>
           <p:nvPr/>
         </p:nvSpPr>
@@ -4661,7 +4713,7 @@
       </p:sp>
       <p:sp>
         <p:nvSpPr>
-          <p:cNvPr id="5" name="Rectangle 4"/>
+          <p:cNvPr id="6" name="Rectangle 5"/>
           <p:cNvSpPr/>
           <p:nvPr/>
         </p:nvSpPr>
@@ -4702,7 +4754,7 @@
       </p:sp>
       <p:sp>
         <p:nvSpPr>
-          <p:cNvPr id="6" name="TextBox 5"/>
+          <p:cNvPr id="7" name="TextBox 6"/>
           <p:cNvSpPr txBox="1"/>
           <p:nvPr/>
         </p:nvSpPr>
@@ -4744,7 +4796,7 @@
       </p:sp>
       <p:sp>
         <p:nvSpPr>
-          <p:cNvPr id="7" name="TextBox 6"/>
+          <p:cNvPr id="8" name="TextBox 7"/>
           <p:cNvSpPr txBox="1"/>
           <p:nvPr/>
         </p:nvSpPr>
@@ -4786,7 +4838,7 @@
       </p:sp>
       <p:sp>
         <p:nvSpPr>
-          <p:cNvPr id="8" name="TextBox 7"/>
+          <p:cNvPr id="9" name="TextBox 8"/>
           <p:cNvSpPr txBox="1"/>
           <p:nvPr/>
         </p:nvSpPr>
@@ -4885,7 +4937,7 @@
       </p:sp>
       <p:sp>
         <p:nvSpPr>
-          <p:cNvPr id="9" name="Rectangle 8"/>
+          <p:cNvPr id="10" name="Rectangle 9"/>
           <p:cNvSpPr/>
           <p:nvPr/>
         </p:nvSpPr>
@@ -4926,7 +4978,7 @@
       </p:sp>
       <p:sp>
         <p:nvSpPr>
-          <p:cNvPr id="10" name="Rectangle 9"/>
+          <p:cNvPr id="11" name="Rectangle 10"/>
           <p:cNvSpPr/>
           <p:nvPr/>
         </p:nvSpPr>
@@ -4967,7 +5019,7 @@
       </p:sp>
       <p:sp>
         <p:nvSpPr>
-          <p:cNvPr id="11" name="Rectangle 10"/>
+          <p:cNvPr id="12" name="Rectangle 11"/>
           <p:cNvSpPr/>
           <p:nvPr/>
         </p:nvSpPr>
@@ -5008,7 +5060,7 @@
       </p:sp>
       <p:sp>
         <p:nvSpPr>
-          <p:cNvPr id="12" name="TextBox 11"/>
+          <p:cNvPr id="13" name="TextBox 12"/>
           <p:cNvSpPr txBox="1"/>
           <p:nvPr/>
         </p:nvSpPr>
@@ -5050,7 +5102,7 @@
       </p:sp>
       <p:sp>
         <p:nvSpPr>
-          <p:cNvPr id="13" name="TextBox 12"/>
+          <p:cNvPr id="14" name="TextBox 13"/>
           <p:cNvSpPr txBox="1"/>
           <p:nvPr/>
         </p:nvSpPr>
@@ -5092,7 +5144,7 @@
       </p:sp>
       <p:sp>
         <p:nvSpPr>
-          <p:cNvPr id="14" name="TextBox 13"/>
+          <p:cNvPr id="15" name="TextBox 14"/>
           <p:cNvSpPr txBox="1"/>
           <p:nvPr/>
         </p:nvSpPr>
@@ -5191,7 +5243,7 @@
       </p:sp>
       <p:sp>
         <p:nvSpPr>
-          <p:cNvPr id="15" name="Rectangle 14"/>
+          <p:cNvPr id="16" name="Rectangle 15"/>
           <p:cNvSpPr/>
           <p:nvPr/>
         </p:nvSpPr>
@@ -5232,7 +5284,7 @@
       </p:sp>
       <p:sp>
         <p:nvSpPr>
-          <p:cNvPr id="16" name="Rectangle 15"/>
+          <p:cNvPr id="17" name="Rectangle 16"/>
           <p:cNvSpPr/>
           <p:nvPr/>
         </p:nvSpPr>
@@ -5273,7 +5325,7 @@
       </p:sp>
       <p:sp>
         <p:nvSpPr>
-          <p:cNvPr id="17" name="Rectangle 16"/>
+          <p:cNvPr id="18" name="Rectangle 17"/>
           <p:cNvSpPr/>
           <p:nvPr/>
         </p:nvSpPr>
@@ -5314,7 +5366,7 @@
       </p:sp>
       <p:sp>
         <p:nvSpPr>
-          <p:cNvPr id="18" name="TextBox 17"/>
+          <p:cNvPr id="19" name="TextBox 18"/>
           <p:cNvSpPr txBox="1"/>
           <p:nvPr/>
         </p:nvSpPr>
@@ -5356,7 +5408,7 @@
       </p:sp>
       <p:sp>
         <p:nvSpPr>
-          <p:cNvPr id="19" name="TextBox 18"/>
+          <p:cNvPr id="20" name="TextBox 19"/>
           <p:cNvSpPr txBox="1"/>
           <p:nvPr/>
         </p:nvSpPr>
@@ -5398,7 +5450,7 @@
       </p:sp>
       <p:sp>
         <p:nvSpPr>
-          <p:cNvPr id="20" name="TextBox 19"/>
+          <p:cNvPr id="21" name="TextBox 20"/>
           <p:cNvSpPr txBox="1"/>
           <p:nvPr/>
         </p:nvSpPr>
@@ -5497,7 +5549,7 @@
       </p:sp>
       <p:sp>
         <p:nvSpPr>
-          <p:cNvPr id="21" name="Rectangle 20"/>
+          <p:cNvPr id="22" name="Rectangle 21"/>
           <p:cNvSpPr/>
           <p:nvPr/>
         </p:nvSpPr>
@@ -5540,7 +5592,7 @@
       </p:sp>
       <p:sp>
         <p:nvSpPr>
-          <p:cNvPr id="22" name="Rectangle 21"/>
+          <p:cNvPr id="23" name="Rectangle 22"/>
           <p:cNvSpPr/>
           <p:nvPr/>
         </p:nvSpPr>
@@ -5581,7 +5633,7 @@
       </p:sp>
       <p:sp>
         <p:nvSpPr>
-          <p:cNvPr id="23" name="TextBox 22"/>
+          <p:cNvPr id="24" name="TextBox 23"/>
           <p:cNvSpPr txBox="1"/>
           <p:nvPr/>
         </p:nvSpPr>
@@ -5699,7 +5751,7 @@
       </p:sp>
       <p:sp>
         <p:nvSpPr>
-          <p:cNvPr id="24" name="TextBox 23"/>
+          <p:cNvPr id="25" name="TextBox 24"/>
           <p:cNvSpPr txBox="1"/>
           <p:nvPr/>
         </p:nvSpPr>

--- a/assets/memos/A5-memo.pptx
+++ b/assets/memos/A5-memo.pptx
@@ -3084,9 +3084,12 @@
   <p:cSld>
     <p:bg>
       <p:bgPr>
-        <a:solidFill>
-          <a:srgbClr val="FFFFFF"/>
-        </a:solidFill>
+        <a:blipFill>
+          <a:blip r:embed="rId2"/>
+          <a:stretch>
+            <a:fillRect/>
+          </a:stretch>
+        </a:blipFill>
         <a:effectLst/>
       </p:bgPr>
     </p:bg>
@@ -3097,35 +3100,9 @@
         <p:nvPr/>
       </p:nvGrpSpPr>
       <p:grpSpPr/>
-      <p:pic>
-        <p:nvPicPr>
-          <p:cNvPr id="2" name="Picture 1" descr="bg-p1.png"/>
-          <p:cNvPicPr>
-            <a:picLocks noChangeAspect="1"/>
-          </p:cNvPicPr>
-          <p:nvPr/>
-        </p:nvPicPr>
-        <p:blipFill>
-          <a:blip r:embed="rId2">
-            <a:alphaModFix amt="80000"/>
-          </a:blip>
-          <a:stretch>
-            <a:fillRect/>
-          </a:stretch>
-        </p:blipFill>
-        <p:spPr>
-          <a:xfrm>
-            <a:off x="0" y="0"/>
-            <a:ext cx="7556399" cy="10692000"/>
-          </a:xfrm>
-          <a:prstGeom prst="rect">
-            <a:avLst/>
-          </a:prstGeom>
-        </p:spPr>
-      </p:pic>
-      <p:sp>
-        <p:nvSpPr>
-          <p:cNvPr id="3" name="TextBox 2"/>
+      <p:sp>
+        <p:nvSpPr>
+          <p:cNvPr id="2" name="TextBox 1"/>
           <p:cNvSpPr txBox="1"/>
           <p:nvPr/>
         </p:nvSpPr>
@@ -3186,7 +3163,7 @@
       </p:sp>
       <p:sp>
         <p:nvSpPr>
-          <p:cNvPr id="4" name="Rectangle 3"/>
+          <p:cNvPr id="3" name="Rectangle 2"/>
           <p:cNvSpPr/>
           <p:nvPr/>
         </p:nvSpPr>
@@ -3227,7 +3204,7 @@
       </p:sp>
       <p:sp>
         <p:nvSpPr>
-          <p:cNvPr id="5" name="Rectangle 4"/>
+          <p:cNvPr id="4" name="Rectangle 3"/>
           <p:cNvSpPr/>
           <p:nvPr/>
         </p:nvSpPr>
@@ -3268,7 +3245,7 @@
       </p:sp>
       <p:sp>
         <p:nvSpPr>
-          <p:cNvPr id="6" name="Rectangle 5"/>
+          <p:cNvPr id="5" name="Rectangle 4"/>
           <p:cNvSpPr/>
           <p:nvPr/>
         </p:nvSpPr>
@@ -3309,7 +3286,7 @@
       </p:sp>
       <p:sp>
         <p:nvSpPr>
-          <p:cNvPr id="7" name="TextBox 6"/>
+          <p:cNvPr id="6" name="TextBox 5"/>
           <p:cNvSpPr txBox="1"/>
           <p:nvPr/>
         </p:nvSpPr>
@@ -3351,7 +3328,7 @@
       </p:sp>
       <p:sp>
         <p:nvSpPr>
-          <p:cNvPr id="8" name="TextBox 7"/>
+          <p:cNvPr id="7" name="TextBox 6"/>
           <p:cNvSpPr txBox="1"/>
           <p:nvPr/>
         </p:nvSpPr>
@@ -3393,7 +3370,7 @@
       </p:sp>
       <p:sp>
         <p:nvSpPr>
-          <p:cNvPr id="9" name="TextBox 8"/>
+          <p:cNvPr id="8" name="TextBox 7"/>
           <p:cNvSpPr txBox="1"/>
           <p:nvPr/>
         </p:nvSpPr>
@@ -3492,7 +3469,7 @@
       </p:sp>
       <p:sp>
         <p:nvSpPr>
-          <p:cNvPr id="10" name="Rectangle 9"/>
+          <p:cNvPr id="9" name="Rectangle 8"/>
           <p:cNvSpPr/>
           <p:nvPr/>
         </p:nvSpPr>
@@ -3533,7 +3510,7 @@
       </p:sp>
       <p:sp>
         <p:nvSpPr>
-          <p:cNvPr id="11" name="Rectangle 10"/>
+          <p:cNvPr id="10" name="Rectangle 9"/>
           <p:cNvSpPr/>
           <p:nvPr/>
         </p:nvSpPr>
@@ -3574,7 +3551,7 @@
       </p:sp>
       <p:sp>
         <p:nvSpPr>
-          <p:cNvPr id="12" name="Rectangle 11"/>
+          <p:cNvPr id="11" name="Rectangle 10"/>
           <p:cNvSpPr/>
           <p:nvPr/>
         </p:nvSpPr>
@@ -3615,7 +3592,7 @@
       </p:sp>
       <p:sp>
         <p:nvSpPr>
-          <p:cNvPr id="13" name="TextBox 12"/>
+          <p:cNvPr id="12" name="TextBox 11"/>
           <p:cNvSpPr txBox="1"/>
           <p:nvPr/>
         </p:nvSpPr>
@@ -3657,7 +3634,7 @@
       </p:sp>
       <p:sp>
         <p:nvSpPr>
-          <p:cNvPr id="14" name="TextBox 13"/>
+          <p:cNvPr id="13" name="TextBox 12"/>
           <p:cNvSpPr txBox="1"/>
           <p:nvPr/>
         </p:nvSpPr>
@@ -3699,7 +3676,7 @@
       </p:sp>
       <p:sp>
         <p:nvSpPr>
-          <p:cNvPr id="15" name="TextBox 14"/>
+          <p:cNvPr id="14" name="TextBox 13"/>
           <p:cNvSpPr txBox="1"/>
           <p:nvPr/>
         </p:nvSpPr>
@@ -3798,7 +3775,7 @@
       </p:sp>
       <p:sp>
         <p:nvSpPr>
-          <p:cNvPr id="16" name="Rectangle 15"/>
+          <p:cNvPr id="15" name="Rectangle 14"/>
           <p:cNvSpPr/>
           <p:nvPr/>
         </p:nvSpPr>
@@ -3839,7 +3816,7 @@
       </p:sp>
       <p:sp>
         <p:nvSpPr>
-          <p:cNvPr id="17" name="Rectangle 16"/>
+          <p:cNvPr id="16" name="Rectangle 15"/>
           <p:cNvSpPr/>
           <p:nvPr/>
         </p:nvSpPr>
@@ -3880,7 +3857,7 @@
       </p:sp>
       <p:sp>
         <p:nvSpPr>
-          <p:cNvPr id="18" name="Rectangle 17"/>
+          <p:cNvPr id="17" name="Rectangle 16"/>
           <p:cNvSpPr/>
           <p:nvPr/>
         </p:nvSpPr>
@@ -3921,7 +3898,7 @@
       </p:sp>
       <p:sp>
         <p:nvSpPr>
-          <p:cNvPr id="19" name="TextBox 18"/>
+          <p:cNvPr id="18" name="TextBox 17"/>
           <p:cNvSpPr txBox="1"/>
           <p:nvPr/>
         </p:nvSpPr>
@@ -3963,7 +3940,7 @@
       </p:sp>
       <p:sp>
         <p:nvSpPr>
-          <p:cNvPr id="20" name="TextBox 19"/>
+          <p:cNvPr id="19" name="TextBox 18"/>
           <p:cNvSpPr txBox="1"/>
           <p:nvPr/>
         </p:nvSpPr>
@@ -4005,7 +3982,7 @@
       </p:sp>
       <p:sp>
         <p:nvSpPr>
-          <p:cNvPr id="21" name="TextBox 20"/>
+          <p:cNvPr id="20" name="TextBox 19"/>
           <p:cNvSpPr txBox="1"/>
           <p:nvPr/>
         </p:nvSpPr>
@@ -4104,7 +4081,7 @@
       </p:sp>
       <p:sp>
         <p:nvSpPr>
-          <p:cNvPr id="22" name="Rectangle 21"/>
+          <p:cNvPr id="21" name="Rectangle 20"/>
           <p:cNvSpPr/>
           <p:nvPr/>
         </p:nvSpPr>
@@ -4145,7 +4122,7 @@
       </p:sp>
       <p:sp>
         <p:nvSpPr>
-          <p:cNvPr id="23" name="Rectangle 22"/>
+          <p:cNvPr id="22" name="Rectangle 21"/>
           <p:cNvSpPr/>
           <p:nvPr/>
         </p:nvSpPr>
@@ -4186,7 +4163,7 @@
       </p:sp>
       <p:sp>
         <p:nvSpPr>
-          <p:cNvPr id="24" name="Rectangle 23"/>
+          <p:cNvPr id="23" name="Rectangle 22"/>
           <p:cNvSpPr/>
           <p:nvPr/>
         </p:nvSpPr>
@@ -4227,7 +4204,7 @@
       </p:sp>
       <p:sp>
         <p:nvSpPr>
-          <p:cNvPr id="25" name="TextBox 24"/>
+          <p:cNvPr id="24" name="TextBox 23"/>
           <p:cNvSpPr txBox="1"/>
           <p:nvPr/>
         </p:nvSpPr>
@@ -4269,7 +4246,7 @@
       </p:sp>
       <p:sp>
         <p:nvSpPr>
-          <p:cNvPr id="26" name="TextBox 25"/>
+          <p:cNvPr id="25" name="TextBox 24"/>
           <p:cNvSpPr txBox="1"/>
           <p:nvPr/>
         </p:nvSpPr>
@@ -4311,7 +4288,7 @@
       </p:sp>
       <p:sp>
         <p:nvSpPr>
-          <p:cNvPr id="27" name="TextBox 26"/>
+          <p:cNvPr id="26" name="TextBox 25"/>
           <p:cNvSpPr txBox="1"/>
           <p:nvPr/>
         </p:nvSpPr>
@@ -4372,7 +4349,7 @@
       </p:sp>
       <p:sp>
         <p:nvSpPr>
-          <p:cNvPr id="28" name="Rectangle 27"/>
+          <p:cNvPr id="27" name="Rectangle 26"/>
           <p:cNvSpPr/>
           <p:nvPr/>
         </p:nvSpPr>
@@ -4415,7 +4392,7 @@
       </p:sp>
       <p:sp>
         <p:nvSpPr>
-          <p:cNvPr id="29" name="TextBox 28"/>
+          <p:cNvPr id="28" name="TextBox 27"/>
           <p:cNvSpPr txBox="1"/>
           <p:nvPr/>
         </p:nvSpPr>
@@ -4476,7 +4453,7 @@
       </p:sp>
       <p:sp>
         <p:nvSpPr>
-          <p:cNvPr id="30" name="TextBox 29"/>
+          <p:cNvPr id="29" name="TextBox 28"/>
           <p:cNvSpPr txBox="1"/>
           <p:nvPr/>
         </p:nvSpPr>
@@ -4529,9 +4506,12 @@
   <p:cSld>
     <p:bg>
       <p:bgPr>
-        <a:solidFill>
-          <a:srgbClr val="FFFFFF"/>
-        </a:solidFill>
+        <a:blipFill>
+          <a:blip r:embed="rId2"/>
+          <a:stretch>
+            <a:fillRect/>
+          </a:stretch>
+        </a:blipFill>
         <a:effectLst/>
       </p:bgPr>
     </p:bg>
@@ -4542,35 +4522,9 @@
         <p:nvPr/>
       </p:nvGrpSpPr>
       <p:grpSpPr/>
-      <p:pic>
-        <p:nvPicPr>
-          <p:cNvPr id="2" name="Picture 1" descr="bg-p2.png"/>
-          <p:cNvPicPr>
-            <a:picLocks noChangeAspect="1"/>
-          </p:cNvPicPr>
-          <p:nvPr/>
-        </p:nvPicPr>
-        <p:blipFill>
-          <a:blip r:embed="rId2">
-            <a:alphaModFix amt="80000"/>
-          </a:blip>
-          <a:stretch>
-            <a:fillRect/>
-          </a:stretch>
-        </p:blipFill>
-        <p:spPr>
-          <a:xfrm>
-            <a:off x="0" y="0"/>
-            <a:ext cx="7556399" cy="10692000"/>
-          </a:xfrm>
-          <a:prstGeom prst="rect">
-            <a:avLst/>
-          </a:prstGeom>
-        </p:spPr>
-      </p:pic>
-      <p:sp>
-        <p:nvSpPr>
-          <p:cNvPr id="3" name="TextBox 2"/>
+      <p:sp>
+        <p:nvSpPr>
+          <p:cNvPr id="2" name="TextBox 1"/>
           <p:cNvSpPr txBox="1"/>
           <p:nvPr/>
         </p:nvSpPr>
@@ -4631,7 +4585,7 @@
       </p:sp>
       <p:sp>
         <p:nvSpPr>
-          <p:cNvPr id="4" name="Rectangle 3"/>
+          <p:cNvPr id="3" name="Rectangle 2"/>
           <p:cNvSpPr/>
           <p:nvPr/>
         </p:nvSpPr>
@@ -4672,7 +4626,7 @@
       </p:sp>
       <p:sp>
         <p:nvSpPr>
-          <p:cNvPr id="5" name="Rectangle 4"/>
+          <p:cNvPr id="4" name="Rectangle 3"/>
           <p:cNvSpPr/>
           <p:nvPr/>
         </p:nvSpPr>
@@ -4713,7 +4667,7 @@
       </p:sp>
       <p:sp>
         <p:nvSpPr>
-          <p:cNvPr id="6" name="Rectangle 5"/>
+          <p:cNvPr id="5" name="Rectangle 4"/>
           <p:cNvSpPr/>
           <p:nvPr/>
         </p:nvSpPr>
@@ -4754,7 +4708,7 @@
       </p:sp>
       <p:sp>
         <p:nvSpPr>
-          <p:cNvPr id="7" name="TextBox 6"/>
+          <p:cNvPr id="6" name="TextBox 5"/>
           <p:cNvSpPr txBox="1"/>
           <p:nvPr/>
         </p:nvSpPr>
@@ -4796,7 +4750,7 @@
       </p:sp>
       <p:sp>
         <p:nvSpPr>
-          <p:cNvPr id="8" name="TextBox 7"/>
+          <p:cNvPr id="7" name="TextBox 6"/>
           <p:cNvSpPr txBox="1"/>
           <p:nvPr/>
         </p:nvSpPr>
@@ -4838,7 +4792,7 @@
       </p:sp>
       <p:sp>
         <p:nvSpPr>
-          <p:cNvPr id="9" name="TextBox 8"/>
+          <p:cNvPr id="8" name="TextBox 7"/>
           <p:cNvSpPr txBox="1"/>
           <p:nvPr/>
         </p:nvSpPr>
@@ -4937,7 +4891,7 @@
       </p:sp>
       <p:sp>
         <p:nvSpPr>
-          <p:cNvPr id="10" name="Rectangle 9"/>
+          <p:cNvPr id="9" name="Rectangle 8"/>
           <p:cNvSpPr/>
           <p:nvPr/>
         </p:nvSpPr>
@@ -4978,7 +4932,7 @@
       </p:sp>
       <p:sp>
         <p:nvSpPr>
-          <p:cNvPr id="11" name="Rectangle 10"/>
+          <p:cNvPr id="10" name="Rectangle 9"/>
           <p:cNvSpPr/>
           <p:nvPr/>
         </p:nvSpPr>
@@ -5019,7 +4973,7 @@
       </p:sp>
       <p:sp>
         <p:nvSpPr>
-          <p:cNvPr id="12" name="Rectangle 11"/>
+          <p:cNvPr id="11" name="Rectangle 10"/>
           <p:cNvSpPr/>
           <p:nvPr/>
         </p:nvSpPr>
@@ -5060,7 +5014,7 @@
       </p:sp>
       <p:sp>
         <p:nvSpPr>
-          <p:cNvPr id="13" name="TextBox 12"/>
+          <p:cNvPr id="12" name="TextBox 11"/>
           <p:cNvSpPr txBox="1"/>
           <p:nvPr/>
         </p:nvSpPr>
@@ -5102,7 +5056,7 @@
       </p:sp>
       <p:sp>
         <p:nvSpPr>
-          <p:cNvPr id="14" name="TextBox 13"/>
+          <p:cNvPr id="13" name="TextBox 12"/>
           <p:cNvSpPr txBox="1"/>
           <p:nvPr/>
         </p:nvSpPr>
@@ -5144,7 +5098,7 @@
       </p:sp>
       <p:sp>
         <p:nvSpPr>
-          <p:cNvPr id="15" name="TextBox 14"/>
+          <p:cNvPr id="14" name="TextBox 13"/>
           <p:cNvSpPr txBox="1"/>
           <p:nvPr/>
         </p:nvSpPr>
@@ -5243,7 +5197,7 @@
       </p:sp>
       <p:sp>
         <p:nvSpPr>
-          <p:cNvPr id="16" name="Rectangle 15"/>
+          <p:cNvPr id="15" name="Rectangle 14"/>
           <p:cNvSpPr/>
           <p:nvPr/>
         </p:nvSpPr>
@@ -5284,7 +5238,7 @@
       </p:sp>
       <p:sp>
         <p:nvSpPr>
-          <p:cNvPr id="17" name="Rectangle 16"/>
+          <p:cNvPr id="16" name="Rectangle 15"/>
           <p:cNvSpPr/>
           <p:nvPr/>
         </p:nvSpPr>
@@ -5325,7 +5279,7 @@
       </p:sp>
       <p:sp>
         <p:nvSpPr>
-          <p:cNvPr id="18" name="Rectangle 17"/>
+          <p:cNvPr id="17" name="Rectangle 16"/>
           <p:cNvSpPr/>
           <p:nvPr/>
         </p:nvSpPr>
@@ -5366,7 +5320,7 @@
       </p:sp>
       <p:sp>
         <p:nvSpPr>
-          <p:cNvPr id="19" name="TextBox 18"/>
+          <p:cNvPr id="18" name="TextBox 17"/>
           <p:cNvSpPr txBox="1"/>
           <p:nvPr/>
         </p:nvSpPr>
@@ -5408,7 +5362,7 @@
       </p:sp>
       <p:sp>
         <p:nvSpPr>
-          <p:cNvPr id="20" name="TextBox 19"/>
+          <p:cNvPr id="19" name="TextBox 18"/>
           <p:cNvSpPr txBox="1"/>
           <p:nvPr/>
         </p:nvSpPr>
@@ -5450,7 +5404,7 @@
       </p:sp>
       <p:sp>
         <p:nvSpPr>
-          <p:cNvPr id="21" name="TextBox 20"/>
+          <p:cNvPr id="20" name="TextBox 19"/>
           <p:cNvSpPr txBox="1"/>
           <p:nvPr/>
         </p:nvSpPr>
@@ -5549,7 +5503,7 @@
       </p:sp>
       <p:sp>
         <p:nvSpPr>
-          <p:cNvPr id="22" name="Rectangle 21"/>
+          <p:cNvPr id="21" name="Rectangle 20"/>
           <p:cNvSpPr/>
           <p:nvPr/>
         </p:nvSpPr>
@@ -5592,7 +5546,7 @@
       </p:sp>
       <p:sp>
         <p:nvSpPr>
-          <p:cNvPr id="23" name="Rectangle 22"/>
+          <p:cNvPr id="22" name="Rectangle 21"/>
           <p:cNvSpPr/>
           <p:nvPr/>
         </p:nvSpPr>
@@ -5633,7 +5587,7 @@
       </p:sp>
       <p:sp>
         <p:nvSpPr>
-          <p:cNvPr id="24" name="TextBox 23"/>
+          <p:cNvPr id="23" name="TextBox 22"/>
           <p:cNvSpPr txBox="1"/>
           <p:nvPr/>
         </p:nvSpPr>
@@ -5751,7 +5705,7 @@
       </p:sp>
       <p:sp>
         <p:nvSpPr>
-          <p:cNvPr id="25" name="TextBox 24"/>
+          <p:cNvPr id="24" name="TextBox 23"/>
           <p:cNvSpPr txBox="1"/>
           <p:nvPr/>
         </p:nvSpPr>
